--- a/public/template.pptx
+++ b/public/template.pptx
@@ -7535,7 +7535,7 @@
                 <a:cs typeface="Roboto Light"/>
                 <a:sym typeface="Roboto Light"/>
               </a:rPr>
-              <a:t xml:space="preserve"> • +55 11 3060.5890</a:t>
+              <a:t> • +55 11 3060.5890</a:t>
             </a:r>
             <a:endParaRPr>
               <a:solidFill>
@@ -7575,7 +7575,7 @@
                 <a:cs typeface="Roboto Light"/>
                 <a:sym typeface="Roboto Light"/>
               </a:rPr>
-              <a:t xml:space="preserve">rua </a:t>
+              <a:t>rua </a:t>
             </a:r>
             <a:r>
               <a:rPr lang="pt-BR">
@@ -9739,7 +9739,7 @@
                 <a:cs typeface="Roboto Light"/>
                 <a:sym typeface="Roboto Light"/>
               </a:rPr>
-              <a:t xml:space="preserve"> • +55 11 3060.5890</a:t>
+              <a:t> • +55 11 3060.5890</a:t>
             </a:r>
             <a:endParaRPr>
               <a:solidFill>
@@ -9779,7 +9779,7 @@
                 <a:cs typeface="Roboto Light"/>
                 <a:sym typeface="Roboto Light"/>
               </a:rPr>
-              <a:t xml:space="preserve">rua </a:t>
+              <a:t>rua </a:t>
             </a:r>
             <a:r>
               <a:rPr lang="pt-BR">
@@ -15202,7 +15202,7 @@
                 <a:cs typeface="Roboto"/>
                 <a:sym typeface="Roboto"/>
               </a:rPr>
-              <a:t xml:space="preserve">Pro Matre </a:t>
+              <a:t>Pro Matre </a:t>
             </a:r>
             <a:br>
               <a:rPr lang="pt-BR" sz="3000">
@@ -15237,7 +15237,7 @@
                 <a:cs typeface="Roboto"/>
                 <a:sym typeface="Roboto"/>
               </a:rPr>
-              <a:t xml:space="preserve"> : 01 a 24 de maio de 2026</a:t>
+              <a:t> : 01 a 31 de abril</a:t>
             </a:r>
             <a:endParaRPr sz="3000">
               <a:solidFill>
@@ -15494,7 +15494,7 @@
                 <a:cs typeface="Roboto"/>
                 <a:sym typeface="Roboto"/>
               </a:rPr>
-              <a:t>Projeção de Resultados para Junho</a:t>
+              <a:t>Projeção de Resultados para Maio</a:t>
             </a:r>
             <a:endParaRPr b="0" i="0" sz="7700" u="none" cap="none" strike="noStrike">
               <a:solidFill>
@@ -15644,7 +15644,7 @@
                 <a:cs typeface="Roboto"/>
                 <a:sym typeface="Roboto"/>
               </a:rPr>
-              <a:t>A projeção para junho acompanha a curva de amadurecimento das campanhas. Com base no ritmo atual — 2.003 conversões em 24 dias —, o mês completo de maio deve atingir 100% da meta. Para junho, mantemos expectativa de crescimento sustentável, com foco em otimização contínua e potencial expansão do budget na campanha Institucional.</a:t>
+              <a:t>A projeção acompanha a curva de amadurecimento das campanhas e mantém uma expectativa de crescimento sustentável, baseada no ganho de eficiência observado desde a mudança de objetivo implementada em março.</a:t>
             </a:r>
             <a:endParaRPr b="1" sz="2200">
               <a:latin typeface="Roboto"/>
@@ -15958,7 +15958,7 @@
                 <a:cs typeface="Roboto"/>
                 <a:sym typeface="Roboto"/>
               </a:rPr>
-              <a:t>Maio (01–24) foi um período de forte performance, com 2.003 conversões via Google Ads e investimento total de R$ 13.289,09 entre Google e Meta. A estratégia orientada para conversão demonstrou maturidade crescente, com o CPA de R$ 4,84 abaixo da meta e a campanha Institucional registrando o melhor CPA do portfólio (R$ 1,88).</a:t>
+              <a:t>Abril foi um mês marcado por desafios sazonais, com feriados que impactaram diretamente o comportamento da demanda ao longo do período. Ainda assim, a estratégia manteve consistência e superou a meta mensal, encerrando o mês com 121% da meta de conversão.</a:t>
             </a:r>
             <a:br>
               <a:rPr lang="pt-BR" sz="1700">
@@ -16009,7 +16009,7 @@
                 <a:cs typeface="Roboto"/>
                 <a:sym typeface="Roboto"/>
               </a:rPr>
-              <a:t>Os botões de agendamento totalizaram 5.004 cliques — crescimento expressivo frente a abril —, com Tuotempo (+105%), WhatsApp (+110%) e Telefone (+293%) registrando aumentos em todos os canais, evidenciando a boa qualidade do tráfego entregue pelas campanhas.</a:t>
+              <a:t>A mudança de objetivo para conversão, implementada em março, segue em processo de amadurecimento e ganho de tração, refletindo em maior eficiência na entrega e evolução do volume de agendamentos.</a:t>
             </a:r>
             <a:endParaRPr sz="1700">
               <a:solidFill>
@@ -16075,7 +16075,7 @@
                 <a:cs typeface="Roboto"/>
                 <a:sym typeface="Roboto"/>
               </a:rPr>
-              <a:t>O Meta Ads cumpriu seu papel estratégico de alcance e awareness, com 1.19M de impressões e CPC de R$ 0,23, complementando o Google Ads na jornada do usuário e contribuindo para o fortalecimento da marca em múltiplos pontos de contato.</a:t>
+              <a:t>Observamos crescimento relevante em canais estratégicos como Tuotempo e Telefone, reforçando a diversificação dos pontos de conversão e sustentando os resultados mesmo diante de oscilações naturais de demanda.</a:t>
             </a:r>
             <a:endParaRPr sz="1700">
               <a:solidFill>
@@ -16175,7 +16175,7 @@
                 <a:cs typeface="Roboto"/>
                 <a:sym typeface="Roboto"/>
               </a:rPr>
-              <a:t>Revisão e atualização dos textos e criativos das campanhas para renovação da comunicação e ganho de relevância no leilão.</a:t>
+              <a:t>Atualização de textos e descrições das campanhas, buscando renovação da comunicação e ganho de relevância.</a:t>
             </a:r>
             <a:br>
               <a:rPr lang="pt-BR" sz="1700">
@@ -16226,7 +16226,7 @@
                 <a:cs typeface="Roboto"/>
                 <a:sym typeface="Roboto"/>
               </a:rPr>
-              <a:t>Avaliação de expansão de budget na campanha Institucional, dado o excelente CPA de R$ 1,88 e alto potencial de escala com eficiência.</a:t>
+              <a:t>Duplicação das campanhas no Meta Ads  para testar uma nova fase de aprendizado e avaliar potencial ganho de CTR e eficiência de entrega.</a:t>
             </a:r>
             <a:br>
               <a:rPr lang="pt-BR" sz="1700">
@@ -16277,7 +16277,7 @@
                 <a:cs typeface="Roboto"/>
                 <a:sym typeface="Roboto"/>
               </a:rPr>
-              <a:t>Continuidade no monitoramento do CPA das campanhas de Plano Maternidade e Pré-Natal, com ajustes de lance e segmentação para ampliar o volume de conversões nessas frentes.</a:t>
+              <a:t>Continuidade no processo de otimização e acompanhamento dos padrões de comportamento dos usuários, visando identificar oportunidades estratégicas para futuras ações.</a:t>
             </a:r>
             <a:endParaRPr sz="1700">
               <a:solidFill>
@@ -16945,7 +16945,7 @@
                 <a:cs typeface="Roboto Black"/>
                 <a:sym typeface="Roboto Black"/>
               </a:rPr>
-              <a:t xml:space="preserve">Big Numbers • </a:t>
+              <a:t>Big Numbers • </a:t>
             </a:r>
             <a:r>
               <a:rPr b="0" i="0" lang="pt-BR" sz="2400" u="none" cap="none" strike="noStrike">
@@ -16969,7 +16969,7 @@
                 <a:cs typeface="Roboto Light"/>
                 <a:sym typeface="Roboto Light"/>
               </a:rPr>
-              <a:t xml:space="preserve"> Maio</a:t>
+              <a:t> Abril</a:t>
             </a:r>
             <a:endParaRPr b="0" i="0" sz="2400" u="none" cap="none" strike="noStrike">
               <a:solidFill>
@@ -17058,7 +17058,7 @@
                 <a:cs typeface="Roboto"/>
                 <a:sym typeface="Roboto"/>
               </a:rPr>
-              <a:t>Em maio, a estratégia de campanhas orientadas para conversão seguiu em amadurecimento e ganho de eficiência. O período de 01 a 24 de maio acumula resultados consistentes via Google Ads, com alta eficiência na campanha Institucional e crescimento expressivo nos botões de agendamento frente a abril.</a:t>
+              <a:t>Em abril, seguimos consolidando a estratégia de campanhas orientadas para conversão, implementada em março. Como esperado nesse tipo de otimização, o algoritmo ganha mais eficiência com o tempo, aprimorando a entrega para públicos com maior propensão à ação e fortalecendo a qualidade das conversões ao longo do período.</a:t>
             </a:r>
             <a:endParaRPr sz="2200">
               <a:solidFill>
@@ -17124,7 +17124,7 @@
                 <a:cs typeface="Roboto"/>
                 <a:sym typeface="Roboto"/>
               </a:rPr>
-              <a:t>O Google Ads manteve performance sólida com CPA de R$ 4,84 e taxa de conversão de 14,5%, enquanto o Meta Ads gerou mais de 1,19 milhão de impressões com CPC de R$ 0,23. Em conjunto, as plataformas totalizaram R$ 13.289,09 em investimento, entregando alcance qualificado e conversões consistentes ao longo do período.</a:t>
+              <a:t>Mesmo diante de um mês impactado por feriados prolongados e por uma última semana antecedendo o feriado de 1º de maio, fatores que costumam influenciar o comportamento do usuário e reduzir o volume de interações, encerramos abril com 2.288 conversões, atingindo 121% da meta mensal (1.895);  reforçando a consistência da estratégia e a eficiência da mídia na geração de resultados.</a:t>
             </a:r>
             <a:endParaRPr sz="2200">
               <a:solidFill>
@@ -18033,7 +18033,7 @@
                           <a:cs typeface="Roboto"/>
                           <a:sym typeface="Roboto"/>
                         </a:rPr>
-                        <a:t>R$ 9.699,59</a:t>
+                        <a:t>R$ 6.953,84</a:t>
                       </a:r>
                       <a:endParaRPr sz="2000">
                         <a:latin typeface="Roboto"/>
@@ -18117,7 +18117,7 @@
                           <a:cs typeface="Roboto"/>
                           <a:sym typeface="Roboto"/>
                         </a:rPr>
-                        <a:t>31.039</a:t>
+                        <a:t>42.710</a:t>
                       </a:r>
                       <a:endParaRPr sz="2000">
                         <a:latin typeface="Roboto"/>
@@ -18201,7 +18201,7 @@
                           <a:cs typeface="Roboto"/>
                           <a:sym typeface="Roboto"/>
                         </a:rPr>
-                        <a:t>44,6%</a:t>
+                        <a:t>15,1%</a:t>
                       </a:r>
                       <a:endParaRPr sz="2000">
                         <a:latin typeface="Roboto"/>
@@ -18282,7 +18282,7 @@
                           <a:cs typeface="Roboto"/>
                           <a:sym typeface="Roboto"/>
                         </a:rPr>
-                        <a:t>R$ 0,70</a:t>
+                        <a:t>R$ 1,08</a:t>
                       </a:r>
                       <a:endParaRPr sz="2000">
                         <a:latin typeface="Roboto"/>
@@ -18363,7 +18363,7 @@
                           <a:cs typeface="Roboto"/>
                           <a:sym typeface="Roboto"/>
                         </a:rPr>
-                        <a:t>13.843</a:t>
+                        <a:t>6.434</a:t>
                       </a:r>
                       <a:endParaRPr sz="2000">
                         <a:latin typeface="Roboto"/>
@@ -18444,7 +18444,7 @@
                           <a:cs typeface="Roboto"/>
                           <a:sym typeface="Roboto"/>
                         </a:rPr>
-                        <a:t>14,5%</a:t>
+                        <a:t>33%</a:t>
                       </a:r>
                       <a:endParaRPr sz="2000">
                         <a:latin typeface="Roboto"/>
@@ -18525,7 +18525,7 @@
                           <a:cs typeface="Roboto"/>
                           <a:sym typeface="Roboto"/>
                         </a:rPr>
-                        <a:t>2.003</a:t>
+                        <a:t>2.275</a:t>
                       </a:r>
                       <a:endParaRPr sz="2000">
                         <a:latin typeface="Roboto"/>
@@ -18606,7 +18606,7 @@
                           <a:cs typeface="Roboto"/>
                           <a:sym typeface="Roboto"/>
                         </a:rPr>
-                        <a:t>R$ 4,84</a:t>
+                        <a:t>R$ 3,06</a:t>
                       </a:r>
                       <a:endParaRPr sz="2000">
                         <a:latin typeface="Roboto"/>
@@ -18773,7 +18773,7 @@
                           <a:cs typeface="Roboto"/>
                           <a:sym typeface="Roboto"/>
                         </a:rPr>
-                        <a:t>R$ 3.589,50</a:t>
+                        <a:t>R$ 1.773,62</a:t>
                       </a:r>
                       <a:endParaRPr sz="2000">
                         <a:latin typeface="Roboto"/>
@@ -18857,7 +18857,7 @@
                           <a:cs typeface="Roboto"/>
                           <a:sym typeface="Roboto"/>
                         </a:rPr>
-                        <a:t>1.199.116</a:t>
+                        <a:t>775.877</a:t>
                       </a:r>
                       <a:endParaRPr sz="2000">
                         <a:latin typeface="Roboto"/>
@@ -18941,7 +18941,7 @@
                           <a:cs typeface="Roboto"/>
                           <a:sym typeface="Roboto"/>
                         </a:rPr>
-                        <a:t>1,31%</a:t>
+                        <a:t>1,3%</a:t>
                       </a:r>
                       <a:endParaRPr sz="2000">
                         <a:latin typeface="Roboto"/>
@@ -19022,7 +19022,7 @@
                           <a:cs typeface="Roboto"/>
                           <a:sym typeface="Roboto"/>
                         </a:rPr>
-                        <a:t>R$ 0,23</a:t>
+                        <a:t>R$ 0,17</a:t>
                       </a:r>
                       <a:endParaRPr sz="2000">
                         <a:latin typeface="Roboto"/>
@@ -19103,7 +19103,7 @@
                           <a:cs typeface="Roboto"/>
                           <a:sym typeface="Roboto"/>
                         </a:rPr>
-                        <a:t>15.662</a:t>
+                        <a:t>10.322</a:t>
                       </a:r>
                       <a:endParaRPr sz="2000">
                         <a:latin typeface="Roboto"/>
@@ -19265,7 +19265,7 @@
                           <a:cs typeface="Roboto"/>
                           <a:sym typeface="Roboto"/>
                         </a:rPr>
-                        <a:t>—</a:t>
+                        <a:t>13</a:t>
                       </a:r>
                       <a:endParaRPr sz="2000">
                         <a:latin typeface="Roboto"/>
@@ -19346,7 +19346,7 @@
                           <a:cs typeface="Roboto"/>
                           <a:sym typeface="Roboto"/>
                         </a:rPr>
-                        <a:t>—</a:t>
+                        <a:t>R$ 136,43</a:t>
                       </a:r>
                       <a:endParaRPr sz="2000">
                         <a:latin typeface="Roboto"/>
@@ -19522,7 +19522,7 @@
                           <a:cs typeface="Roboto"/>
                           <a:sym typeface="Roboto"/>
                         </a:rPr>
-                        <a:t>R$ 13.289,09</a:t>
+                        <a:t>R$ 8.727,46</a:t>
                       </a:r>
                       <a:endParaRPr b="1" sz="2000">
                         <a:solidFill>
@@ -19612,7 +19612,7 @@
                           <a:cs typeface="Roboto"/>
                           <a:sym typeface="Roboto"/>
                         </a:rPr>
-                        <a:t>1.230.155</a:t>
+                        <a:t>818.587</a:t>
                       </a:r>
                       <a:endParaRPr b="1" sz="2000">
                         <a:solidFill>
@@ -19702,7 +19702,7 @@
                           <a:cs typeface="Roboto"/>
                           <a:sym typeface="Roboto"/>
                         </a:rPr>
-                        <a:t>2,4%</a:t>
+                        <a:t>2,05%</a:t>
                       </a:r>
                       <a:endParaRPr b="1" sz="2000">
                         <a:solidFill>
@@ -19792,7 +19792,7 @@
                           <a:cs typeface="Roboto"/>
                           <a:sym typeface="Roboto"/>
                         </a:rPr>
-                        <a:t>R$ 0,45</a:t>
+                        <a:t>R$ 0,52</a:t>
                       </a:r>
                       <a:endParaRPr b="1" sz="2000">
                         <a:solidFill>
@@ -19882,7 +19882,7 @@
                           <a:cs typeface="Roboto"/>
                           <a:sym typeface="Roboto"/>
                         </a:rPr>
-                        <a:t>29.505</a:t>
+                        <a:t>16.756</a:t>
                       </a:r>
                       <a:endParaRPr b="1" sz="2000">
                         <a:solidFill>
@@ -19972,7 +19972,7 @@
                           <a:cs typeface="Roboto"/>
                           <a:sym typeface="Roboto"/>
                         </a:rPr>
-                        <a:t>14,5%</a:t>
+                        <a:t>26,22%</a:t>
                       </a:r>
                       <a:endParaRPr b="1" sz="2000">
                         <a:solidFill>
@@ -20062,7 +20062,7 @@
                           <a:cs typeface="Roboto"/>
                           <a:sym typeface="Roboto"/>
                         </a:rPr>
-                        <a:t>2.003</a:t>
+                        <a:t>2.288</a:t>
                       </a:r>
                       <a:endParaRPr b="1" sz="2000">
                         <a:solidFill>
@@ -20152,7 +20152,7 @@
                           <a:cs typeface="Roboto"/>
                           <a:sym typeface="Roboto"/>
                         </a:rPr>
-                        <a:t>R$ 4,84</a:t>
+                        <a:t>R$ 3,81</a:t>
                       </a:r>
                       <a:endParaRPr b="1" sz="2000">
                         <a:solidFill>
@@ -20343,7 +20343,7 @@
                 <a:cs typeface="Roboto Black"/>
                 <a:sym typeface="Roboto Black"/>
               </a:rPr>
-              <a:t>80%</a:t>
+              <a:t>43%</a:t>
             </a:r>
             <a:endParaRPr/>
           </a:p>
@@ -20427,7 +20427,7 @@
                 <a:cs typeface="Roboto"/>
                 <a:sym typeface="Roboto"/>
               </a:rPr>
-              <a:t xml:space="preserve"> Em maio, o ritmo de conversões segue a curva de crescimento esperada. Com 2.003 conversões nas primeiras 24 dias do mês — 80% da meta de 2.500 —, a trajetória indica que o objetivo mensal está ao alcance, mantendo a consistência do planejamento estratégico iniciado em março.</a:t>
+              <a:t> Desde janeiro, acompanhamos uma projeção contínua de crescimento no volume de conversões, com metas mensais estruturadas para sustentar essa evolução de forma consistente. Os resultados de abril reforçam essa trajetória, mostrando que o planejamento vem sendo executado com eficiência e aderência às expectativas de crescimento.</a:t>
             </a:r>
             <a:endParaRPr sz="2000">
               <a:solidFill>
@@ -20719,7 +20719,7 @@
                 <a:cs typeface="Roboto"/>
                 <a:sym typeface="Roboto"/>
               </a:rPr>
-              <a:t>Em maio, o Tuotempo registrou crescimento expressivo frente a abril (+105%), consolidando-se como o principal canal de agendamento online. O WhatsApp também apresentou crescimento relevante (+110%), mantendo-se como canal de alto volume de interação.</a:t>
+              <a:t>Em abril, observamos uma leve retração no volume de conversões via WhatsApp, movimento concentrado principalmente na semana da Páscoa, período em que feriados costumam impactar diretamente o comportamento e a disponibilidade dos usuários para interação.</a:t>
             </a:r>
             <a:endParaRPr sz="2200">
               <a:solidFill>
@@ -20785,7 +20785,7 @@
                 <a:cs typeface="Roboto"/>
                 <a:sym typeface="Roboto"/>
               </a:rPr>
-              <a:t>O Telefone registrou crescimento de +293% frente a abril, reflexo da maior visibilidade dos botões de contato na landing page. No total, os botões de agendamento somaram 5.004 interações em maio — resultado expressivo para o período parcial do mês.</a:t>
+              <a:t>Ainda assim, o cenário geral se manteve positivo, com crescimento expressivo nos canais de Tuotempo e Telefone. Esse avanço foi impulsionado pelos ajustes realizados nos botões da landing page no final de março, conforme recomendação estratégica, melhorando a visibilidade e usabilidade desses pontos de contato e contribuindo para o aumento das interações nesses canais.</a:t>
             </a:r>
             <a:endParaRPr sz="1800">
               <a:latin typeface="Roboto"/>
@@ -21594,6 +21594,698 @@
                           <a:cs typeface="Roboto"/>
                           <a:sym typeface="Roboto"/>
                         </a:rPr>
+                        <a:t>Fevereiro</a:t>
+                      </a:r>
+                      <a:endParaRPr sz="2400" u="none" cap="none" strike="noStrike">
+                        <a:latin typeface="Roboto"/>
+                        <a:ea typeface="Roboto"/>
+                        <a:cs typeface="Roboto"/>
+                        <a:sym typeface="Roboto"/>
+                      </a:endParaRPr>
+                    </a:p>
+                  </a:txBody>
+                  <a:tcPr marT="9525" marB="0" marR="9525" marL="9525" anchor="ctr">
+                    <a:lnL cap="flat" cmpd="sng" w="9525">
+                      <a:solidFill>
+                        <a:srgbClr val="000000">
+                          <a:alpha val="0"/>
+                        </a:srgbClr>
+                      </a:solidFill>
+                      <a:prstDash val="solid"/>
+                      <a:round/>
+                      <a:headEnd len="sm" w="sm" type="none"/>
+                      <a:tailEnd len="sm" w="sm" type="none"/>
+                    </a:lnL>
+                    <a:lnR cap="flat" cmpd="sng" w="9525">
+                      <a:solidFill>
+                        <a:srgbClr val="000000">
+                          <a:alpha val="0"/>
+                        </a:srgbClr>
+                      </a:solidFill>
+                      <a:prstDash val="solid"/>
+                      <a:round/>
+                      <a:headEnd len="sm" w="sm" type="none"/>
+                      <a:tailEnd len="sm" w="sm" type="none"/>
+                    </a:lnR>
+                    <a:lnT cap="flat" cmpd="sng" w="9525">
+                      <a:solidFill>
+                        <a:srgbClr val="000000">
+                          <a:alpha val="0"/>
+                        </a:srgbClr>
+                      </a:solidFill>
+                      <a:prstDash val="solid"/>
+                      <a:round/>
+                      <a:headEnd len="sm" w="sm" type="none"/>
+                      <a:tailEnd len="sm" w="sm" type="none"/>
+                    </a:lnT>
+                    <a:lnB cap="flat" cmpd="sng" w="9525">
+                      <a:solidFill>
+                        <a:srgbClr val="000000">
+                          <a:alpha val="0"/>
+                        </a:srgbClr>
+                      </a:solidFill>
+                      <a:prstDash val="solid"/>
+                      <a:round/>
+                      <a:headEnd len="sm" w="sm" type="none"/>
+                      <a:tailEnd len="sm" w="sm" type="none"/>
+                    </a:lnB>
+                    <a:solidFill>
+                      <a:srgbClr val="F2F2F2"/>
+                    </a:solidFill>
+                  </a:tcPr>
+                </a:tc>
+                <a:tc>
+                  <a:txBody>
+                    <a:bodyPr/>
+                    <a:lstStyle/>
+                    <a:p>
+                      <a:pPr indent="0" lvl="0" marL="0" marR="0" rtl="0" algn="ctr">
+                        <a:lnSpc>
+                          <a:spcPct val="100000"/>
+                        </a:lnSpc>
+                        <a:spcBef>
+                          <a:spcPts val="0"/>
+                        </a:spcBef>
+                        <a:spcAft>
+                          <a:spcPts val="0"/>
+                        </a:spcAft>
+                        <a:buClr>
+                          <a:srgbClr val="000000"/>
+                        </a:buClr>
+                        <a:buSzPts val="1800"/>
+                        <a:buFont typeface="Arial"/>
+                        <a:buNone/>
+                      </a:pPr>
+                      <a:r>
+                        <a:rPr b="1" lang="pt-BR" sz="2400">
+                          <a:latin typeface="Roboto"/>
+                          <a:ea typeface="Roboto"/>
+                          <a:cs typeface="Roboto"/>
+                          <a:sym typeface="Roboto"/>
+                        </a:rPr>
+                        <a:t>975</a:t>
+                      </a:r>
+                      <a:endParaRPr sz="2400" u="none" cap="none" strike="noStrike">
+                        <a:latin typeface="Roboto"/>
+                        <a:ea typeface="Roboto"/>
+                        <a:cs typeface="Roboto"/>
+                        <a:sym typeface="Roboto"/>
+                      </a:endParaRPr>
+                    </a:p>
+                  </a:txBody>
+                  <a:tcPr marT="9525" marB="0" marR="9525" marL="9525" anchor="ctr">
+                    <a:lnL cap="flat" cmpd="sng" w="9525">
+                      <a:solidFill>
+                        <a:srgbClr val="000000">
+                          <a:alpha val="0"/>
+                        </a:srgbClr>
+                      </a:solidFill>
+                      <a:prstDash val="solid"/>
+                      <a:round/>
+                      <a:headEnd len="sm" w="sm" type="none"/>
+                      <a:tailEnd len="sm" w="sm" type="none"/>
+                    </a:lnL>
+                    <a:lnR cap="flat" cmpd="sng" w="9525">
+                      <a:solidFill>
+                        <a:srgbClr val="000000">
+                          <a:alpha val="0"/>
+                        </a:srgbClr>
+                      </a:solidFill>
+                      <a:prstDash val="solid"/>
+                      <a:round/>
+                      <a:headEnd len="sm" w="sm" type="none"/>
+                      <a:tailEnd len="sm" w="sm" type="none"/>
+                    </a:lnR>
+                    <a:lnT cap="flat" cmpd="sng" w="9525">
+                      <a:solidFill>
+                        <a:srgbClr val="000000">
+                          <a:alpha val="0"/>
+                        </a:srgbClr>
+                      </a:solidFill>
+                      <a:prstDash val="solid"/>
+                      <a:round/>
+                      <a:headEnd len="sm" w="sm" type="none"/>
+                      <a:tailEnd len="sm" w="sm" type="none"/>
+                    </a:lnT>
+                    <a:lnB cap="flat" cmpd="sng" w="9525">
+                      <a:solidFill>
+                        <a:srgbClr val="000000">
+                          <a:alpha val="0"/>
+                        </a:srgbClr>
+                      </a:solidFill>
+                      <a:prstDash val="solid"/>
+                      <a:round/>
+                      <a:headEnd len="sm" w="sm" type="none"/>
+                      <a:tailEnd len="sm" w="sm" type="none"/>
+                    </a:lnB>
+                    <a:solidFill>
+                      <a:srgbClr val="F2F2F2"/>
+                    </a:solidFill>
+                  </a:tcPr>
+                </a:tc>
+                <a:tc>
+                  <a:txBody>
+                    <a:bodyPr/>
+                    <a:lstStyle/>
+                    <a:p>
+                      <a:pPr indent="0" lvl="0" marL="0" marR="0" rtl="0" algn="ctr">
+                        <a:lnSpc>
+                          <a:spcPct val="100000"/>
+                        </a:lnSpc>
+                        <a:spcBef>
+                          <a:spcPts val="0"/>
+                        </a:spcBef>
+                        <a:spcAft>
+                          <a:spcPts val="0"/>
+                        </a:spcAft>
+                        <a:buClr>
+                          <a:srgbClr val="000000"/>
+                        </a:buClr>
+                        <a:buSzPts val="1800"/>
+                        <a:buFont typeface="Arial"/>
+                        <a:buNone/>
+                      </a:pPr>
+                      <a:r>
+                        <a:rPr b="1" lang="pt-BR" sz="2400">
+                          <a:latin typeface="Roboto"/>
+                          <a:ea typeface="Roboto"/>
+                          <a:cs typeface="Roboto"/>
+                          <a:sym typeface="Roboto"/>
+                        </a:rPr>
+                        <a:t>736</a:t>
+                      </a:r>
+                      <a:endParaRPr b="1" sz="2400" u="none" cap="none" strike="noStrike">
+                        <a:latin typeface="Roboto"/>
+                        <a:ea typeface="Roboto"/>
+                        <a:cs typeface="Roboto"/>
+                        <a:sym typeface="Roboto"/>
+                      </a:endParaRPr>
+                    </a:p>
+                  </a:txBody>
+                  <a:tcPr marT="9525" marB="0" marR="9525" marL="9525" anchor="ctr">
+                    <a:lnL cap="flat" cmpd="sng" w="9525">
+                      <a:solidFill>
+                        <a:srgbClr val="000000">
+                          <a:alpha val="0"/>
+                        </a:srgbClr>
+                      </a:solidFill>
+                      <a:prstDash val="solid"/>
+                      <a:round/>
+                      <a:headEnd len="sm" w="sm" type="none"/>
+                      <a:tailEnd len="sm" w="sm" type="none"/>
+                    </a:lnL>
+                    <a:lnR cap="flat" cmpd="sng" w="9525">
+                      <a:solidFill>
+                        <a:srgbClr val="000000">
+                          <a:alpha val="0"/>
+                        </a:srgbClr>
+                      </a:solidFill>
+                      <a:prstDash val="solid"/>
+                      <a:round/>
+                      <a:headEnd len="sm" w="sm" type="none"/>
+                      <a:tailEnd len="sm" w="sm" type="none"/>
+                    </a:lnR>
+                    <a:lnT cap="flat" cmpd="sng" w="9525">
+                      <a:solidFill>
+                        <a:srgbClr val="000000">
+                          <a:alpha val="0"/>
+                        </a:srgbClr>
+                      </a:solidFill>
+                      <a:prstDash val="solid"/>
+                      <a:round/>
+                      <a:headEnd len="sm" w="sm" type="none"/>
+                      <a:tailEnd len="sm" w="sm" type="none"/>
+                    </a:lnT>
+                    <a:lnB cap="flat" cmpd="sng" w="9525">
+                      <a:solidFill>
+                        <a:srgbClr val="000000">
+                          <a:alpha val="0"/>
+                        </a:srgbClr>
+                      </a:solidFill>
+                      <a:prstDash val="solid"/>
+                      <a:round/>
+                      <a:headEnd len="sm" w="sm" type="none"/>
+                      <a:tailEnd len="sm" w="sm" type="none"/>
+                    </a:lnB>
+                    <a:solidFill>
+                      <a:srgbClr val="F2F2F2"/>
+                    </a:solidFill>
+                  </a:tcPr>
+                </a:tc>
+                <a:tc>
+                  <a:txBody>
+                    <a:bodyPr/>
+                    <a:lstStyle/>
+                    <a:p>
+                      <a:pPr indent="0" lvl="0" marL="0" marR="0" rtl="0" algn="ctr">
+                        <a:lnSpc>
+                          <a:spcPct val="100000"/>
+                        </a:lnSpc>
+                        <a:spcBef>
+                          <a:spcPts val="0"/>
+                        </a:spcBef>
+                        <a:spcAft>
+                          <a:spcPts val="0"/>
+                        </a:spcAft>
+                        <a:buClr>
+                          <a:srgbClr val="000000"/>
+                        </a:buClr>
+                        <a:buSzPts val="1800"/>
+                        <a:buFont typeface="Arial"/>
+                        <a:buNone/>
+                      </a:pPr>
+                      <a:r>
+                        <a:rPr b="1" lang="pt-BR" sz="2400">
+                          <a:latin typeface="Roboto"/>
+                          <a:ea typeface="Roboto"/>
+                          <a:cs typeface="Roboto"/>
+                          <a:sym typeface="Roboto"/>
+                        </a:rPr>
+                        <a:t>96</a:t>
+                      </a:r>
+                      <a:endParaRPr b="1" sz="2400" u="none" cap="none" strike="noStrike">
+                        <a:latin typeface="Roboto"/>
+                        <a:ea typeface="Roboto"/>
+                        <a:cs typeface="Roboto"/>
+                        <a:sym typeface="Roboto"/>
+                      </a:endParaRPr>
+                    </a:p>
+                  </a:txBody>
+                  <a:tcPr marT="9525" marB="0" marR="9525" marL="9525" anchor="ctr">
+                    <a:lnL cap="flat" cmpd="sng" w="9525">
+                      <a:solidFill>
+                        <a:srgbClr val="000000">
+                          <a:alpha val="0"/>
+                        </a:srgbClr>
+                      </a:solidFill>
+                      <a:prstDash val="solid"/>
+                      <a:round/>
+                      <a:headEnd len="sm" w="sm" type="none"/>
+                      <a:tailEnd len="sm" w="sm" type="none"/>
+                    </a:lnL>
+                    <a:lnR cap="flat" cmpd="sng" w="9525">
+                      <a:solidFill>
+                        <a:srgbClr val="000000">
+                          <a:alpha val="0"/>
+                        </a:srgbClr>
+                      </a:solidFill>
+                      <a:prstDash val="solid"/>
+                      <a:round/>
+                      <a:headEnd len="sm" w="sm" type="none"/>
+                      <a:tailEnd len="sm" w="sm" type="none"/>
+                    </a:lnR>
+                    <a:lnT cap="flat" cmpd="sng" w="9525">
+                      <a:solidFill>
+                        <a:srgbClr val="000000">
+                          <a:alpha val="0"/>
+                        </a:srgbClr>
+                      </a:solidFill>
+                      <a:prstDash val="solid"/>
+                      <a:round/>
+                      <a:headEnd len="sm" w="sm" type="none"/>
+                      <a:tailEnd len="sm" w="sm" type="none"/>
+                    </a:lnT>
+                    <a:lnB cap="flat" cmpd="sng" w="9525">
+                      <a:solidFill>
+                        <a:srgbClr val="000000">
+                          <a:alpha val="0"/>
+                        </a:srgbClr>
+                      </a:solidFill>
+                      <a:prstDash val="solid"/>
+                      <a:round/>
+                      <a:headEnd len="sm" w="sm" type="none"/>
+                      <a:tailEnd len="sm" w="sm" type="none"/>
+                    </a:lnB>
+                    <a:solidFill>
+                      <a:srgbClr val="F2F2F2"/>
+                    </a:solidFill>
+                  </a:tcPr>
+                </a:tc>
+              </a:tr>
+              <a:tr h="433250">
+                <a:tc>
+                  <a:txBody>
+                    <a:bodyPr/>
+                    <a:lstStyle/>
+                    <a:p>
+                      <a:pPr indent="0" lvl="0" marL="0" marR="0" rtl="0" algn="l">
+                        <a:lnSpc>
+                          <a:spcPct val="100000"/>
+                        </a:lnSpc>
+                        <a:spcBef>
+                          <a:spcPts val="0"/>
+                        </a:spcBef>
+                        <a:spcAft>
+                          <a:spcPts val="0"/>
+                        </a:spcAft>
+                        <a:buClr>
+                          <a:srgbClr val="000000"/>
+                        </a:buClr>
+                        <a:buSzPts val="1100"/>
+                        <a:buFont typeface="Arial"/>
+                        <a:buNone/>
+                      </a:pPr>
+                      <a:r>
+                        <a:t/>
+                      </a:r>
+                      <a:endParaRPr i="0" sz="2400" u="none" cap="none" strike="noStrike">
+                        <a:solidFill>
+                          <a:srgbClr val="000000"/>
+                        </a:solidFill>
+                        <a:latin typeface="Roboto"/>
+                        <a:ea typeface="Roboto"/>
+                        <a:cs typeface="Roboto"/>
+                        <a:sym typeface="Roboto"/>
+                      </a:endParaRPr>
+                    </a:p>
+                  </a:txBody>
+                  <a:tcPr marT="9525" marB="0" marR="9525" marL="9525" anchor="b">
+                    <a:lnL cap="flat" cmpd="sng" w="9525">
+                      <a:solidFill>
+                        <a:srgbClr val="000000">
+                          <a:alpha val="0"/>
+                        </a:srgbClr>
+                      </a:solidFill>
+                      <a:prstDash val="solid"/>
+                      <a:round/>
+                      <a:headEnd len="sm" w="sm" type="none"/>
+                      <a:tailEnd len="sm" w="sm" type="none"/>
+                    </a:lnL>
+                    <a:lnR cap="flat" cmpd="sng" w="9525">
+                      <a:solidFill>
+                        <a:srgbClr val="000000">
+                          <a:alpha val="0"/>
+                        </a:srgbClr>
+                      </a:solidFill>
+                      <a:prstDash val="solid"/>
+                      <a:round/>
+                      <a:headEnd len="sm" w="sm" type="none"/>
+                      <a:tailEnd len="sm" w="sm" type="none"/>
+                    </a:lnR>
+                    <a:lnT cap="flat" cmpd="sng" w="9525">
+                      <a:solidFill>
+                        <a:srgbClr val="000000">
+                          <a:alpha val="0"/>
+                        </a:srgbClr>
+                      </a:solidFill>
+                      <a:prstDash val="solid"/>
+                      <a:round/>
+                      <a:headEnd len="sm" w="sm" type="none"/>
+                      <a:tailEnd len="sm" w="sm" type="none"/>
+                    </a:lnT>
+                    <a:lnB cap="flat" cmpd="sng" w="9525">
+                      <a:solidFill>
+                        <a:srgbClr val="000000">
+                          <a:alpha val="0"/>
+                        </a:srgbClr>
+                      </a:solidFill>
+                      <a:prstDash val="solid"/>
+                      <a:round/>
+                      <a:headEnd len="sm" w="sm" type="none"/>
+                      <a:tailEnd len="sm" w="sm" type="none"/>
+                    </a:lnB>
+                  </a:tcPr>
+                </a:tc>
+                <a:tc>
+                  <a:txBody>
+                    <a:bodyPr/>
+                    <a:lstStyle/>
+                    <a:p>
+                      <a:pPr indent="0" lvl="0" marL="0" marR="0" rtl="0" algn="l">
+                        <a:lnSpc>
+                          <a:spcPct val="100000"/>
+                        </a:lnSpc>
+                        <a:spcBef>
+                          <a:spcPts val="0"/>
+                        </a:spcBef>
+                        <a:spcAft>
+                          <a:spcPts val="0"/>
+                        </a:spcAft>
+                        <a:buClr>
+                          <a:srgbClr val="000000"/>
+                        </a:buClr>
+                        <a:buSzPts val="1100"/>
+                        <a:buFont typeface="Arial"/>
+                        <a:buNone/>
+                      </a:pPr>
+                      <a:r>
+                        <a:t/>
+                      </a:r>
+                      <a:endParaRPr i="0" sz="2400" u="none" cap="none" strike="noStrike">
+                        <a:solidFill>
+                          <a:srgbClr val="000000"/>
+                        </a:solidFill>
+                        <a:latin typeface="Roboto"/>
+                        <a:ea typeface="Roboto"/>
+                        <a:cs typeface="Roboto"/>
+                        <a:sym typeface="Roboto"/>
+                      </a:endParaRPr>
+                    </a:p>
+                  </a:txBody>
+                  <a:tcPr marT="9525" marB="0" marR="9525" marL="9525" anchor="b">
+                    <a:lnL cap="flat" cmpd="sng" w="9525">
+                      <a:solidFill>
+                        <a:srgbClr val="000000">
+                          <a:alpha val="0"/>
+                        </a:srgbClr>
+                      </a:solidFill>
+                      <a:prstDash val="solid"/>
+                      <a:round/>
+                      <a:headEnd len="sm" w="sm" type="none"/>
+                      <a:tailEnd len="sm" w="sm" type="none"/>
+                    </a:lnL>
+                    <a:lnR cap="flat" cmpd="sng" w="9525">
+                      <a:solidFill>
+                        <a:srgbClr val="000000">
+                          <a:alpha val="0"/>
+                        </a:srgbClr>
+                      </a:solidFill>
+                      <a:prstDash val="solid"/>
+                      <a:round/>
+                      <a:headEnd len="sm" w="sm" type="none"/>
+                      <a:tailEnd len="sm" w="sm" type="none"/>
+                    </a:lnR>
+                    <a:lnT cap="flat" cmpd="sng" w="9525">
+                      <a:solidFill>
+                        <a:srgbClr val="000000">
+                          <a:alpha val="0"/>
+                        </a:srgbClr>
+                      </a:solidFill>
+                      <a:prstDash val="solid"/>
+                      <a:round/>
+                      <a:headEnd len="sm" w="sm" type="none"/>
+                      <a:tailEnd len="sm" w="sm" type="none"/>
+                    </a:lnT>
+                    <a:lnB cap="flat" cmpd="sng" w="9525">
+                      <a:solidFill>
+                        <a:srgbClr val="000000">
+                          <a:alpha val="0"/>
+                        </a:srgbClr>
+                      </a:solidFill>
+                      <a:prstDash val="solid"/>
+                      <a:round/>
+                      <a:headEnd len="sm" w="sm" type="none"/>
+                      <a:tailEnd len="sm" w="sm" type="none"/>
+                    </a:lnB>
+                  </a:tcPr>
+                </a:tc>
+                <a:tc>
+                  <a:txBody>
+                    <a:bodyPr/>
+                    <a:lstStyle/>
+                    <a:p>
+                      <a:pPr indent="0" lvl="0" marL="0" marR="0" rtl="0" algn="l">
+                        <a:lnSpc>
+                          <a:spcPct val="100000"/>
+                        </a:lnSpc>
+                        <a:spcBef>
+                          <a:spcPts val="0"/>
+                        </a:spcBef>
+                        <a:spcAft>
+                          <a:spcPts val="0"/>
+                        </a:spcAft>
+                        <a:buClr>
+                          <a:srgbClr val="000000"/>
+                        </a:buClr>
+                        <a:buSzPts val="1100"/>
+                        <a:buFont typeface="Arial"/>
+                        <a:buNone/>
+                      </a:pPr>
+                      <a:r>
+                        <a:t/>
+                      </a:r>
+                      <a:endParaRPr i="0" sz="2400" u="none" cap="none" strike="noStrike">
+                        <a:solidFill>
+                          <a:srgbClr val="000000"/>
+                        </a:solidFill>
+                        <a:latin typeface="Roboto"/>
+                        <a:ea typeface="Roboto"/>
+                        <a:cs typeface="Roboto"/>
+                        <a:sym typeface="Roboto"/>
+                      </a:endParaRPr>
+                    </a:p>
+                  </a:txBody>
+                  <a:tcPr marT="9525" marB="0" marR="9525" marL="9525" anchor="b">
+                    <a:lnL cap="flat" cmpd="sng" w="9525">
+                      <a:solidFill>
+                        <a:srgbClr val="000000">
+                          <a:alpha val="0"/>
+                        </a:srgbClr>
+                      </a:solidFill>
+                      <a:prstDash val="solid"/>
+                      <a:round/>
+                      <a:headEnd len="sm" w="sm" type="none"/>
+                      <a:tailEnd len="sm" w="sm" type="none"/>
+                    </a:lnL>
+                    <a:lnR cap="flat" cmpd="sng" w="9525">
+                      <a:solidFill>
+                        <a:srgbClr val="000000">
+                          <a:alpha val="0"/>
+                        </a:srgbClr>
+                      </a:solidFill>
+                      <a:prstDash val="solid"/>
+                      <a:round/>
+                      <a:headEnd len="sm" w="sm" type="none"/>
+                      <a:tailEnd len="sm" w="sm" type="none"/>
+                    </a:lnR>
+                    <a:lnT cap="flat" cmpd="sng" w="9525">
+                      <a:solidFill>
+                        <a:srgbClr val="000000">
+                          <a:alpha val="0"/>
+                        </a:srgbClr>
+                      </a:solidFill>
+                      <a:prstDash val="solid"/>
+                      <a:round/>
+                      <a:headEnd len="sm" w="sm" type="none"/>
+                      <a:tailEnd len="sm" w="sm" type="none"/>
+                    </a:lnT>
+                    <a:lnB cap="flat" cmpd="sng" w="9525">
+                      <a:solidFill>
+                        <a:srgbClr val="000000">
+                          <a:alpha val="0"/>
+                        </a:srgbClr>
+                      </a:solidFill>
+                      <a:prstDash val="solid"/>
+                      <a:round/>
+                      <a:headEnd len="sm" w="sm" type="none"/>
+                      <a:tailEnd len="sm" w="sm" type="none"/>
+                    </a:lnB>
+                  </a:tcPr>
+                </a:tc>
+                <a:tc>
+                  <a:txBody>
+                    <a:bodyPr/>
+                    <a:lstStyle/>
+                    <a:p>
+                      <a:pPr indent="0" lvl="0" marL="0" marR="0" rtl="0" algn="l">
+                        <a:lnSpc>
+                          <a:spcPct val="100000"/>
+                        </a:lnSpc>
+                        <a:spcBef>
+                          <a:spcPts val="0"/>
+                        </a:spcBef>
+                        <a:spcAft>
+                          <a:spcPts val="0"/>
+                        </a:spcAft>
+                        <a:buClr>
+                          <a:srgbClr val="000000"/>
+                        </a:buClr>
+                        <a:buSzPts val="1100"/>
+                        <a:buFont typeface="Arial"/>
+                        <a:buNone/>
+                      </a:pPr>
+                      <a:r>
+                        <a:t/>
+                      </a:r>
+                      <a:endParaRPr i="0" sz="2400" u="none" cap="none" strike="noStrike">
+                        <a:solidFill>
+                          <a:srgbClr val="000000"/>
+                        </a:solidFill>
+                        <a:latin typeface="Roboto"/>
+                        <a:ea typeface="Roboto"/>
+                        <a:cs typeface="Roboto"/>
+                        <a:sym typeface="Roboto"/>
+                      </a:endParaRPr>
+                    </a:p>
+                  </a:txBody>
+                  <a:tcPr marT="9525" marB="0" marR="9525" marL="9525" anchor="b">
+                    <a:lnL cap="flat" cmpd="sng" w="9525">
+                      <a:solidFill>
+                        <a:srgbClr val="000000">
+                          <a:alpha val="0"/>
+                        </a:srgbClr>
+                      </a:solidFill>
+                      <a:prstDash val="solid"/>
+                      <a:round/>
+                      <a:headEnd len="sm" w="sm" type="none"/>
+                      <a:tailEnd len="sm" w="sm" type="none"/>
+                    </a:lnL>
+                    <a:lnR cap="flat" cmpd="sng" w="9525">
+                      <a:solidFill>
+                        <a:srgbClr val="000000">
+                          <a:alpha val="0"/>
+                        </a:srgbClr>
+                      </a:solidFill>
+                      <a:prstDash val="solid"/>
+                      <a:round/>
+                      <a:headEnd len="sm" w="sm" type="none"/>
+                      <a:tailEnd len="sm" w="sm" type="none"/>
+                    </a:lnR>
+                    <a:lnT cap="flat" cmpd="sng" w="9525">
+                      <a:solidFill>
+                        <a:srgbClr val="000000">
+                          <a:alpha val="0"/>
+                        </a:srgbClr>
+                      </a:solidFill>
+                      <a:prstDash val="solid"/>
+                      <a:round/>
+                      <a:headEnd len="sm" w="sm" type="none"/>
+                      <a:tailEnd len="sm" w="sm" type="none"/>
+                    </a:lnT>
+                    <a:lnB cap="flat" cmpd="sng" w="9525">
+                      <a:solidFill>
+                        <a:srgbClr val="000000">
+                          <a:alpha val="0"/>
+                        </a:srgbClr>
+                      </a:solidFill>
+                      <a:prstDash val="solid"/>
+                      <a:round/>
+                      <a:headEnd len="sm" w="sm" type="none"/>
+                      <a:tailEnd len="sm" w="sm" type="none"/>
+                    </a:lnB>
+                  </a:tcPr>
+                </a:tc>
+              </a:tr>
+              <a:tr h="781125">
+                <a:tc>
+                  <a:txBody>
+                    <a:bodyPr/>
+                    <a:lstStyle/>
+                    <a:p>
+                      <a:pPr indent="0" lvl="0" marL="0" marR="0" rtl="0" algn="ctr">
+                        <a:lnSpc>
+                          <a:spcPct val="100000"/>
+                        </a:lnSpc>
+                        <a:spcBef>
+                          <a:spcPts val="0"/>
+                        </a:spcBef>
+                        <a:spcAft>
+                          <a:spcPts val="0"/>
+                        </a:spcAft>
+                        <a:buClr>
+                          <a:srgbClr val="000000"/>
+                        </a:buClr>
+                        <a:buSzPts val="1800"/>
+                        <a:buFont typeface="Arial"/>
+                        <a:buNone/>
+                      </a:pPr>
+                      <a:r>
+                        <a:rPr b="1" lang="pt-BR" sz="2400">
+                          <a:latin typeface="Roboto"/>
+                          <a:ea typeface="Roboto"/>
+                          <a:cs typeface="Roboto"/>
+                          <a:sym typeface="Roboto"/>
+                        </a:rPr>
                         <a:t>Março</a:t>
                       </a:r>
                       <a:endParaRPr sz="2400" u="none" cap="none" strike="noStrike">
@@ -22554,698 +23246,6 @@
                           <a:sym typeface="Roboto"/>
                         </a:rPr>
                         <a:t>163</a:t>
-                      </a:r>
-                      <a:endParaRPr b="1" sz="2400" u="none" cap="none" strike="noStrike">
-                        <a:latin typeface="Roboto"/>
-                        <a:ea typeface="Roboto"/>
-                        <a:cs typeface="Roboto"/>
-                        <a:sym typeface="Roboto"/>
-                      </a:endParaRPr>
-                    </a:p>
-                  </a:txBody>
-                  <a:tcPr marT="9525" marB="0" marR="9525" marL="9525" anchor="ctr">
-                    <a:lnL cap="flat" cmpd="sng" w="9525">
-                      <a:solidFill>
-                        <a:srgbClr val="000000">
-                          <a:alpha val="0"/>
-                        </a:srgbClr>
-                      </a:solidFill>
-                      <a:prstDash val="solid"/>
-                      <a:round/>
-                      <a:headEnd len="sm" w="sm" type="none"/>
-                      <a:tailEnd len="sm" w="sm" type="none"/>
-                    </a:lnL>
-                    <a:lnR cap="flat" cmpd="sng" w="9525">
-                      <a:solidFill>
-                        <a:srgbClr val="000000">
-                          <a:alpha val="0"/>
-                        </a:srgbClr>
-                      </a:solidFill>
-                      <a:prstDash val="solid"/>
-                      <a:round/>
-                      <a:headEnd len="sm" w="sm" type="none"/>
-                      <a:tailEnd len="sm" w="sm" type="none"/>
-                    </a:lnR>
-                    <a:lnT cap="flat" cmpd="sng" w="9525">
-                      <a:solidFill>
-                        <a:srgbClr val="000000">
-                          <a:alpha val="0"/>
-                        </a:srgbClr>
-                      </a:solidFill>
-                      <a:prstDash val="solid"/>
-                      <a:round/>
-                      <a:headEnd len="sm" w="sm" type="none"/>
-                      <a:tailEnd len="sm" w="sm" type="none"/>
-                    </a:lnT>
-                    <a:lnB cap="flat" cmpd="sng" w="9525">
-                      <a:solidFill>
-                        <a:srgbClr val="000000">
-                          <a:alpha val="0"/>
-                        </a:srgbClr>
-                      </a:solidFill>
-                      <a:prstDash val="solid"/>
-                      <a:round/>
-                      <a:headEnd len="sm" w="sm" type="none"/>
-                      <a:tailEnd len="sm" w="sm" type="none"/>
-                    </a:lnB>
-                    <a:solidFill>
-                      <a:srgbClr val="F2F2F2"/>
-                    </a:solidFill>
-                  </a:tcPr>
-                </a:tc>
-              </a:tr>
-              <a:tr h="433250">
-                <a:tc>
-                  <a:txBody>
-                    <a:bodyPr/>
-                    <a:lstStyle/>
-                    <a:p>
-                      <a:pPr indent="0" lvl="0" marL="0" marR="0" rtl="0" algn="l">
-                        <a:lnSpc>
-                          <a:spcPct val="100000"/>
-                        </a:lnSpc>
-                        <a:spcBef>
-                          <a:spcPts val="0"/>
-                        </a:spcBef>
-                        <a:spcAft>
-                          <a:spcPts val="0"/>
-                        </a:spcAft>
-                        <a:buClr>
-                          <a:srgbClr val="000000"/>
-                        </a:buClr>
-                        <a:buSzPts val="1100"/>
-                        <a:buFont typeface="Arial"/>
-                        <a:buNone/>
-                      </a:pPr>
-                      <a:r>
-                        <a:t/>
-                      </a:r>
-                      <a:endParaRPr i="0" sz="2400" u="none" cap="none" strike="noStrike">
-                        <a:solidFill>
-                          <a:srgbClr val="000000"/>
-                        </a:solidFill>
-                        <a:latin typeface="Roboto"/>
-                        <a:ea typeface="Roboto"/>
-                        <a:cs typeface="Roboto"/>
-                        <a:sym typeface="Roboto"/>
-                      </a:endParaRPr>
-                    </a:p>
-                  </a:txBody>
-                  <a:tcPr marT="9525" marB="0" marR="9525" marL="9525" anchor="b">
-                    <a:lnL cap="flat" cmpd="sng" w="9525">
-                      <a:solidFill>
-                        <a:srgbClr val="000000">
-                          <a:alpha val="0"/>
-                        </a:srgbClr>
-                      </a:solidFill>
-                      <a:prstDash val="solid"/>
-                      <a:round/>
-                      <a:headEnd len="sm" w="sm" type="none"/>
-                      <a:tailEnd len="sm" w="sm" type="none"/>
-                    </a:lnL>
-                    <a:lnR cap="flat" cmpd="sng" w="9525">
-                      <a:solidFill>
-                        <a:srgbClr val="000000">
-                          <a:alpha val="0"/>
-                        </a:srgbClr>
-                      </a:solidFill>
-                      <a:prstDash val="solid"/>
-                      <a:round/>
-                      <a:headEnd len="sm" w="sm" type="none"/>
-                      <a:tailEnd len="sm" w="sm" type="none"/>
-                    </a:lnR>
-                    <a:lnT cap="flat" cmpd="sng" w="9525">
-                      <a:solidFill>
-                        <a:srgbClr val="000000">
-                          <a:alpha val="0"/>
-                        </a:srgbClr>
-                      </a:solidFill>
-                      <a:prstDash val="solid"/>
-                      <a:round/>
-                      <a:headEnd len="sm" w="sm" type="none"/>
-                      <a:tailEnd len="sm" w="sm" type="none"/>
-                    </a:lnT>
-                    <a:lnB cap="flat" cmpd="sng" w="9525">
-                      <a:solidFill>
-                        <a:srgbClr val="000000">
-                          <a:alpha val="0"/>
-                        </a:srgbClr>
-                      </a:solidFill>
-                      <a:prstDash val="solid"/>
-                      <a:round/>
-                      <a:headEnd len="sm" w="sm" type="none"/>
-                      <a:tailEnd len="sm" w="sm" type="none"/>
-                    </a:lnB>
-                  </a:tcPr>
-                </a:tc>
-                <a:tc>
-                  <a:txBody>
-                    <a:bodyPr/>
-                    <a:lstStyle/>
-                    <a:p>
-                      <a:pPr indent="0" lvl="0" marL="0" marR="0" rtl="0" algn="l">
-                        <a:lnSpc>
-                          <a:spcPct val="100000"/>
-                        </a:lnSpc>
-                        <a:spcBef>
-                          <a:spcPts val="0"/>
-                        </a:spcBef>
-                        <a:spcAft>
-                          <a:spcPts val="0"/>
-                        </a:spcAft>
-                        <a:buClr>
-                          <a:srgbClr val="000000"/>
-                        </a:buClr>
-                        <a:buSzPts val="1100"/>
-                        <a:buFont typeface="Arial"/>
-                        <a:buNone/>
-                      </a:pPr>
-                      <a:r>
-                        <a:t/>
-                      </a:r>
-                      <a:endParaRPr i="0" sz="2400" u="none" cap="none" strike="noStrike">
-                        <a:solidFill>
-                          <a:srgbClr val="000000"/>
-                        </a:solidFill>
-                        <a:latin typeface="Roboto"/>
-                        <a:ea typeface="Roboto"/>
-                        <a:cs typeface="Roboto"/>
-                        <a:sym typeface="Roboto"/>
-                      </a:endParaRPr>
-                    </a:p>
-                  </a:txBody>
-                  <a:tcPr marT="9525" marB="0" marR="9525" marL="9525" anchor="b">
-                    <a:lnL cap="flat" cmpd="sng" w="9525">
-                      <a:solidFill>
-                        <a:srgbClr val="000000">
-                          <a:alpha val="0"/>
-                        </a:srgbClr>
-                      </a:solidFill>
-                      <a:prstDash val="solid"/>
-                      <a:round/>
-                      <a:headEnd len="sm" w="sm" type="none"/>
-                      <a:tailEnd len="sm" w="sm" type="none"/>
-                    </a:lnL>
-                    <a:lnR cap="flat" cmpd="sng" w="9525">
-                      <a:solidFill>
-                        <a:srgbClr val="000000">
-                          <a:alpha val="0"/>
-                        </a:srgbClr>
-                      </a:solidFill>
-                      <a:prstDash val="solid"/>
-                      <a:round/>
-                      <a:headEnd len="sm" w="sm" type="none"/>
-                      <a:tailEnd len="sm" w="sm" type="none"/>
-                    </a:lnR>
-                    <a:lnT cap="flat" cmpd="sng" w="9525">
-                      <a:solidFill>
-                        <a:srgbClr val="000000">
-                          <a:alpha val="0"/>
-                        </a:srgbClr>
-                      </a:solidFill>
-                      <a:prstDash val="solid"/>
-                      <a:round/>
-                      <a:headEnd len="sm" w="sm" type="none"/>
-                      <a:tailEnd len="sm" w="sm" type="none"/>
-                    </a:lnT>
-                    <a:lnB cap="flat" cmpd="sng" w="9525">
-                      <a:solidFill>
-                        <a:srgbClr val="000000">
-                          <a:alpha val="0"/>
-                        </a:srgbClr>
-                      </a:solidFill>
-                      <a:prstDash val="solid"/>
-                      <a:round/>
-                      <a:headEnd len="sm" w="sm" type="none"/>
-                      <a:tailEnd len="sm" w="sm" type="none"/>
-                    </a:lnB>
-                  </a:tcPr>
-                </a:tc>
-                <a:tc>
-                  <a:txBody>
-                    <a:bodyPr/>
-                    <a:lstStyle/>
-                    <a:p>
-                      <a:pPr indent="0" lvl="0" marL="0" marR="0" rtl="0" algn="l">
-                        <a:lnSpc>
-                          <a:spcPct val="100000"/>
-                        </a:lnSpc>
-                        <a:spcBef>
-                          <a:spcPts val="0"/>
-                        </a:spcBef>
-                        <a:spcAft>
-                          <a:spcPts val="0"/>
-                        </a:spcAft>
-                        <a:buClr>
-                          <a:srgbClr val="000000"/>
-                        </a:buClr>
-                        <a:buSzPts val="1100"/>
-                        <a:buFont typeface="Arial"/>
-                        <a:buNone/>
-                      </a:pPr>
-                      <a:r>
-                        <a:t/>
-                      </a:r>
-                      <a:endParaRPr i="0" sz="2400" u="none" cap="none" strike="noStrike">
-                        <a:solidFill>
-                          <a:srgbClr val="000000"/>
-                        </a:solidFill>
-                        <a:latin typeface="Roboto"/>
-                        <a:ea typeface="Roboto"/>
-                        <a:cs typeface="Roboto"/>
-                        <a:sym typeface="Roboto"/>
-                      </a:endParaRPr>
-                    </a:p>
-                  </a:txBody>
-                  <a:tcPr marT="9525" marB="0" marR="9525" marL="9525" anchor="b">
-                    <a:lnL cap="flat" cmpd="sng" w="9525">
-                      <a:solidFill>
-                        <a:srgbClr val="000000">
-                          <a:alpha val="0"/>
-                        </a:srgbClr>
-                      </a:solidFill>
-                      <a:prstDash val="solid"/>
-                      <a:round/>
-                      <a:headEnd len="sm" w="sm" type="none"/>
-                      <a:tailEnd len="sm" w="sm" type="none"/>
-                    </a:lnL>
-                    <a:lnR cap="flat" cmpd="sng" w="9525">
-                      <a:solidFill>
-                        <a:srgbClr val="000000">
-                          <a:alpha val="0"/>
-                        </a:srgbClr>
-                      </a:solidFill>
-                      <a:prstDash val="solid"/>
-                      <a:round/>
-                      <a:headEnd len="sm" w="sm" type="none"/>
-                      <a:tailEnd len="sm" w="sm" type="none"/>
-                    </a:lnR>
-                    <a:lnT cap="flat" cmpd="sng" w="9525">
-                      <a:solidFill>
-                        <a:srgbClr val="000000">
-                          <a:alpha val="0"/>
-                        </a:srgbClr>
-                      </a:solidFill>
-                      <a:prstDash val="solid"/>
-                      <a:round/>
-                      <a:headEnd len="sm" w="sm" type="none"/>
-                      <a:tailEnd len="sm" w="sm" type="none"/>
-                    </a:lnT>
-                    <a:lnB cap="flat" cmpd="sng" w="9525">
-                      <a:solidFill>
-                        <a:srgbClr val="000000">
-                          <a:alpha val="0"/>
-                        </a:srgbClr>
-                      </a:solidFill>
-                      <a:prstDash val="solid"/>
-                      <a:round/>
-                      <a:headEnd len="sm" w="sm" type="none"/>
-                      <a:tailEnd len="sm" w="sm" type="none"/>
-                    </a:lnB>
-                  </a:tcPr>
-                </a:tc>
-                <a:tc>
-                  <a:txBody>
-                    <a:bodyPr/>
-                    <a:lstStyle/>
-                    <a:p>
-                      <a:pPr indent="0" lvl="0" marL="0" marR="0" rtl="0" algn="l">
-                        <a:lnSpc>
-                          <a:spcPct val="100000"/>
-                        </a:lnSpc>
-                        <a:spcBef>
-                          <a:spcPts val="0"/>
-                        </a:spcBef>
-                        <a:spcAft>
-                          <a:spcPts val="0"/>
-                        </a:spcAft>
-                        <a:buClr>
-                          <a:srgbClr val="000000"/>
-                        </a:buClr>
-                        <a:buSzPts val="1100"/>
-                        <a:buFont typeface="Arial"/>
-                        <a:buNone/>
-                      </a:pPr>
-                      <a:r>
-                        <a:t/>
-                      </a:r>
-                      <a:endParaRPr i="0" sz="2400" u="none" cap="none" strike="noStrike">
-                        <a:solidFill>
-                          <a:srgbClr val="000000"/>
-                        </a:solidFill>
-                        <a:latin typeface="Roboto"/>
-                        <a:ea typeface="Roboto"/>
-                        <a:cs typeface="Roboto"/>
-                        <a:sym typeface="Roboto"/>
-                      </a:endParaRPr>
-                    </a:p>
-                  </a:txBody>
-                  <a:tcPr marT="9525" marB="0" marR="9525" marL="9525" anchor="b">
-                    <a:lnL cap="flat" cmpd="sng" w="9525">
-                      <a:solidFill>
-                        <a:srgbClr val="000000">
-                          <a:alpha val="0"/>
-                        </a:srgbClr>
-                      </a:solidFill>
-                      <a:prstDash val="solid"/>
-                      <a:round/>
-                      <a:headEnd len="sm" w="sm" type="none"/>
-                      <a:tailEnd len="sm" w="sm" type="none"/>
-                    </a:lnL>
-                    <a:lnR cap="flat" cmpd="sng" w="9525">
-                      <a:solidFill>
-                        <a:srgbClr val="000000">
-                          <a:alpha val="0"/>
-                        </a:srgbClr>
-                      </a:solidFill>
-                      <a:prstDash val="solid"/>
-                      <a:round/>
-                      <a:headEnd len="sm" w="sm" type="none"/>
-                      <a:tailEnd len="sm" w="sm" type="none"/>
-                    </a:lnR>
-                    <a:lnT cap="flat" cmpd="sng" w="9525">
-                      <a:solidFill>
-                        <a:srgbClr val="000000">
-                          <a:alpha val="0"/>
-                        </a:srgbClr>
-                      </a:solidFill>
-                      <a:prstDash val="solid"/>
-                      <a:round/>
-                      <a:headEnd len="sm" w="sm" type="none"/>
-                      <a:tailEnd len="sm" w="sm" type="none"/>
-                    </a:lnT>
-                    <a:lnB cap="flat" cmpd="sng" w="9525">
-                      <a:solidFill>
-                        <a:srgbClr val="000000">
-                          <a:alpha val="0"/>
-                        </a:srgbClr>
-                      </a:solidFill>
-                      <a:prstDash val="solid"/>
-                      <a:round/>
-                      <a:headEnd len="sm" w="sm" type="none"/>
-                      <a:tailEnd len="sm" w="sm" type="none"/>
-                    </a:lnB>
-                  </a:tcPr>
-                </a:tc>
-              </a:tr>
-              <a:tr h="781125">
-                <a:tc>
-                  <a:txBody>
-                    <a:bodyPr/>
-                    <a:lstStyle/>
-                    <a:p>
-                      <a:pPr indent="0" lvl="0" marL="0" marR="0" rtl="0" algn="ctr">
-                        <a:lnSpc>
-                          <a:spcPct val="100000"/>
-                        </a:lnSpc>
-                        <a:spcBef>
-                          <a:spcPts val="0"/>
-                        </a:spcBef>
-                        <a:spcAft>
-                          <a:spcPts val="0"/>
-                        </a:spcAft>
-                        <a:buClr>
-                          <a:srgbClr val="000000"/>
-                        </a:buClr>
-                        <a:buSzPts val="1800"/>
-                        <a:buFont typeface="Arial"/>
-                        <a:buNone/>
-                      </a:pPr>
-                      <a:r>
-                        <a:rPr b="1" lang="pt-BR" sz="2400">
-                          <a:latin typeface="Roboto"/>
-                          <a:ea typeface="Roboto"/>
-                          <a:cs typeface="Roboto"/>
-                          <a:sym typeface="Roboto"/>
-                        </a:rPr>
-                        <a:t>Maio</a:t>
-                      </a:r>
-                      <a:endParaRPr sz="2400" u="none" cap="none" strike="noStrike">
-                        <a:latin typeface="Roboto"/>
-                        <a:ea typeface="Roboto"/>
-                        <a:cs typeface="Roboto"/>
-                        <a:sym typeface="Roboto"/>
-                      </a:endParaRPr>
-                    </a:p>
-                  </a:txBody>
-                  <a:tcPr marT="9525" marB="0" marR="9525" marL="9525" anchor="ctr">
-                    <a:lnL cap="flat" cmpd="sng" w="9525">
-                      <a:solidFill>
-                        <a:srgbClr val="000000">
-                          <a:alpha val="0"/>
-                        </a:srgbClr>
-                      </a:solidFill>
-                      <a:prstDash val="solid"/>
-                      <a:round/>
-                      <a:headEnd len="sm" w="sm" type="none"/>
-                      <a:tailEnd len="sm" w="sm" type="none"/>
-                    </a:lnL>
-                    <a:lnR cap="flat" cmpd="sng" w="9525">
-                      <a:solidFill>
-                        <a:srgbClr val="000000">
-                          <a:alpha val="0"/>
-                        </a:srgbClr>
-                      </a:solidFill>
-                      <a:prstDash val="solid"/>
-                      <a:round/>
-                      <a:headEnd len="sm" w="sm" type="none"/>
-                      <a:tailEnd len="sm" w="sm" type="none"/>
-                    </a:lnR>
-                    <a:lnT cap="flat" cmpd="sng" w="9525">
-                      <a:solidFill>
-                        <a:srgbClr val="000000">
-                          <a:alpha val="0"/>
-                        </a:srgbClr>
-                      </a:solidFill>
-                      <a:prstDash val="solid"/>
-                      <a:round/>
-                      <a:headEnd len="sm" w="sm" type="none"/>
-                      <a:tailEnd len="sm" w="sm" type="none"/>
-                    </a:lnT>
-                    <a:lnB cap="flat" cmpd="sng" w="9525">
-                      <a:solidFill>
-                        <a:srgbClr val="000000">
-                          <a:alpha val="0"/>
-                        </a:srgbClr>
-                      </a:solidFill>
-                      <a:prstDash val="solid"/>
-                      <a:round/>
-                      <a:headEnd len="sm" w="sm" type="none"/>
-                      <a:tailEnd len="sm" w="sm" type="none"/>
-                    </a:lnB>
-                    <a:solidFill>
-                      <a:srgbClr val="F2F2F2"/>
-                    </a:solidFill>
-                  </a:tcPr>
-                </a:tc>
-                <a:tc>
-                  <a:txBody>
-                    <a:bodyPr/>
-                    <a:lstStyle/>
-                    <a:p>
-                      <a:pPr indent="0" lvl="0" marL="0" marR="0" rtl="0" algn="ctr">
-                        <a:lnSpc>
-                          <a:spcPct val="100000"/>
-                        </a:lnSpc>
-                        <a:spcBef>
-                          <a:spcPts val="0"/>
-                        </a:spcBef>
-                        <a:spcAft>
-                          <a:spcPts val="0"/>
-                        </a:spcAft>
-                        <a:buClr>
-                          <a:srgbClr val="000000"/>
-                        </a:buClr>
-                        <a:buSzPts val="1800"/>
-                        <a:buFont typeface="Arial"/>
-                        <a:buNone/>
-                      </a:pPr>
-                      <a:r>
-                        <a:rPr b="1" lang="pt-BR" sz="2400">
-                          <a:latin typeface="Roboto"/>
-                          <a:ea typeface="Roboto"/>
-                          <a:cs typeface="Roboto"/>
-                          <a:sym typeface="Roboto"/>
-                        </a:rPr>
-                        <a:t>2.259</a:t>
-                      </a:r>
-                      <a:endParaRPr sz="2400" u="none" cap="none" strike="noStrike">
-                        <a:latin typeface="Roboto"/>
-                        <a:ea typeface="Roboto"/>
-                        <a:cs typeface="Roboto"/>
-                        <a:sym typeface="Roboto"/>
-                      </a:endParaRPr>
-                    </a:p>
-                  </a:txBody>
-                  <a:tcPr marT="9525" marB="0" marR="9525" marL="9525" anchor="ctr">
-                    <a:lnL cap="flat" cmpd="sng" w="9525">
-                      <a:solidFill>
-                        <a:srgbClr val="000000">
-                          <a:alpha val="0"/>
-                        </a:srgbClr>
-                      </a:solidFill>
-                      <a:prstDash val="solid"/>
-                      <a:round/>
-                      <a:headEnd len="sm" w="sm" type="none"/>
-                      <a:tailEnd len="sm" w="sm" type="none"/>
-                    </a:lnL>
-                    <a:lnR cap="flat" cmpd="sng" w="9525">
-                      <a:solidFill>
-                        <a:srgbClr val="000000">
-                          <a:alpha val="0"/>
-                        </a:srgbClr>
-                      </a:solidFill>
-                      <a:prstDash val="solid"/>
-                      <a:round/>
-                      <a:headEnd len="sm" w="sm" type="none"/>
-                      <a:tailEnd len="sm" w="sm" type="none"/>
-                    </a:lnR>
-                    <a:lnT cap="flat" cmpd="sng" w="9525">
-                      <a:solidFill>
-                        <a:srgbClr val="000000">
-                          <a:alpha val="0"/>
-                        </a:srgbClr>
-                      </a:solidFill>
-                      <a:prstDash val="solid"/>
-                      <a:round/>
-                      <a:headEnd len="sm" w="sm" type="none"/>
-                      <a:tailEnd len="sm" w="sm" type="none"/>
-                    </a:lnT>
-                    <a:lnB cap="flat" cmpd="sng" w="9525">
-                      <a:solidFill>
-                        <a:srgbClr val="000000">
-                          <a:alpha val="0"/>
-                        </a:srgbClr>
-                      </a:solidFill>
-                      <a:prstDash val="solid"/>
-                      <a:round/>
-                      <a:headEnd len="sm" w="sm" type="none"/>
-                      <a:tailEnd len="sm" w="sm" type="none"/>
-                    </a:lnB>
-                    <a:solidFill>
-                      <a:srgbClr val="F2F2F2"/>
-                    </a:solidFill>
-                  </a:tcPr>
-                </a:tc>
-                <a:tc>
-                  <a:txBody>
-                    <a:bodyPr/>
-                    <a:lstStyle/>
-                    <a:p>
-                      <a:pPr indent="0" lvl="0" marL="0" marR="0" rtl="0" algn="ctr">
-                        <a:lnSpc>
-                          <a:spcPct val="100000"/>
-                        </a:lnSpc>
-                        <a:spcBef>
-                          <a:spcPts val="0"/>
-                        </a:spcBef>
-                        <a:spcAft>
-                          <a:spcPts val="0"/>
-                        </a:spcAft>
-                        <a:buClr>
-                          <a:srgbClr val="000000"/>
-                        </a:buClr>
-                        <a:buSzPts val="1800"/>
-                        <a:buFont typeface="Arial"/>
-                        <a:buNone/>
-                      </a:pPr>
-                      <a:r>
-                        <a:rPr b="1" lang="pt-BR" sz="2400">
-                          <a:latin typeface="Roboto"/>
-                          <a:ea typeface="Roboto"/>
-                          <a:cs typeface="Roboto"/>
-                          <a:sym typeface="Roboto"/>
-                        </a:rPr>
-                        <a:t>2.104</a:t>
-                      </a:r>
-                      <a:endParaRPr b="1" sz="2400" u="none" cap="none" strike="noStrike">
-                        <a:latin typeface="Roboto"/>
-                        <a:ea typeface="Roboto"/>
-                        <a:cs typeface="Roboto"/>
-                        <a:sym typeface="Roboto"/>
-                      </a:endParaRPr>
-                    </a:p>
-                  </a:txBody>
-                  <a:tcPr marT="9525" marB="0" marR="9525" marL="9525" anchor="ctr">
-                    <a:lnL cap="flat" cmpd="sng" w="9525">
-                      <a:solidFill>
-                        <a:srgbClr val="000000">
-                          <a:alpha val="0"/>
-                        </a:srgbClr>
-                      </a:solidFill>
-                      <a:prstDash val="solid"/>
-                      <a:round/>
-                      <a:headEnd len="sm" w="sm" type="none"/>
-                      <a:tailEnd len="sm" w="sm" type="none"/>
-                    </a:lnL>
-                    <a:lnR cap="flat" cmpd="sng" w="9525">
-                      <a:solidFill>
-                        <a:srgbClr val="000000">
-                          <a:alpha val="0"/>
-                        </a:srgbClr>
-                      </a:solidFill>
-                      <a:prstDash val="solid"/>
-                      <a:round/>
-                      <a:headEnd len="sm" w="sm" type="none"/>
-                      <a:tailEnd len="sm" w="sm" type="none"/>
-                    </a:lnR>
-                    <a:lnT cap="flat" cmpd="sng" w="9525">
-                      <a:solidFill>
-                        <a:srgbClr val="000000">
-                          <a:alpha val="0"/>
-                        </a:srgbClr>
-                      </a:solidFill>
-                      <a:prstDash val="solid"/>
-                      <a:round/>
-                      <a:headEnd len="sm" w="sm" type="none"/>
-                      <a:tailEnd len="sm" w="sm" type="none"/>
-                    </a:lnT>
-                    <a:lnB cap="flat" cmpd="sng" w="9525">
-                      <a:solidFill>
-                        <a:srgbClr val="000000">
-                          <a:alpha val="0"/>
-                        </a:srgbClr>
-                      </a:solidFill>
-                      <a:prstDash val="solid"/>
-                      <a:round/>
-                      <a:headEnd len="sm" w="sm" type="none"/>
-                      <a:tailEnd len="sm" w="sm" type="none"/>
-                    </a:lnB>
-                    <a:solidFill>
-                      <a:srgbClr val="F2F2F2"/>
-                    </a:solidFill>
-                  </a:tcPr>
-                </a:tc>
-                <a:tc>
-                  <a:txBody>
-                    <a:bodyPr/>
-                    <a:lstStyle/>
-                    <a:p>
-                      <a:pPr indent="0" lvl="0" marL="0" marR="0" rtl="0" algn="ctr">
-                        <a:lnSpc>
-                          <a:spcPct val="100000"/>
-                        </a:lnSpc>
-                        <a:spcBef>
-                          <a:spcPts val="0"/>
-                        </a:spcBef>
-                        <a:spcAft>
-                          <a:spcPts val="0"/>
-                        </a:spcAft>
-                        <a:buClr>
-                          <a:srgbClr val="000000"/>
-                        </a:buClr>
-                        <a:buSzPts val="1800"/>
-                        <a:buFont typeface="Arial"/>
-                        <a:buNone/>
-                      </a:pPr>
-                      <a:r>
-                        <a:rPr b="1" lang="pt-BR" sz="2400">
-                          <a:latin typeface="Roboto"/>
-                          <a:ea typeface="Roboto"/>
-                          <a:cs typeface="Roboto"/>
-                          <a:sym typeface="Roboto"/>
-                        </a:rPr>
-                        <a:t>641</a:t>
                       </a:r>
                       <a:endParaRPr b="1" sz="2400" u="none" cap="none" strike="noStrike">
                         <a:latin typeface="Roboto"/>
@@ -23534,7 +23534,7 @@
                 <a:cs typeface="Roboto"/>
                 <a:sym typeface="Roboto"/>
               </a:rPr>
-              <a:t>Em maio, a campanha Institucional manteve sua liderança com 1.260 conversões via Google Ads e alto volume de cliques nos botões de agendamento, com destaque para o Tuotempo. O CPA de R$ 1,88 reforça a excelente eficiência desta campanha no portfólio.</a:t>
+              <a:t>A campanha Institucional segue como principal responsável pelo volume de conversões, com destaque para o canal Tuotempo, que concentrou a maior parte dos agendamentos no período. Esse comportamento reforça a força da campanha na captura de demanda mais qualificada e na geração de ações de maior intenção.</a:t>
             </a:r>
             <a:endParaRPr sz="2200">
               <a:solidFill>
@@ -23600,7 +23600,7 @@
                 <a:cs typeface="Roboto"/>
                 <a:sym typeface="Roboto"/>
               </a:rPr>
-              <a:t>As campanhas de Exames e Pré-Natal seguiram com participação complementar, somando 518 e 170 conversões respectivamente. Ambas contribuem para diversificar os pontos de entrada e fortalecer a presença da marca em frentes específicas de serviço.</a:t>
+              <a:t>As campanhas de Exames e Pré-Natal mantiveram participação complementar na estratégia, contribuindo para diversificar os pontos de entrada e fortalecer a presença da marca em frentes específicas de serviço. Mesmo com menor volume, esses resultados apoiam a construção de relevância e sustentação do ecossistema de conversão como um todo.</a:t>
             </a:r>
             <a:endParaRPr sz="2200">
               <a:solidFill>
@@ -24146,7 +24146,7 @@
                           <a:cs typeface="Roboto"/>
                           <a:sym typeface="Roboto"/>
                         </a:rPr>
-                        <a:t>400</a:t>
+                        <a:t>654</a:t>
                       </a:r>
                       <a:endParaRPr sz="2400">
                         <a:latin typeface="Roboto"/>
@@ -24227,7 +24227,7 @@
                           <a:cs typeface="Roboto"/>
                           <a:sym typeface="Roboto"/>
                         </a:rPr>
-                        <a:t>768</a:t>
+                        <a:t>880</a:t>
                       </a:r>
                       <a:endParaRPr sz="2400">
                         <a:latin typeface="Roboto"/>
@@ -24308,7 +24308,7 @@
                           <a:cs typeface="Roboto"/>
                           <a:sym typeface="Roboto"/>
                         </a:rPr>
-                        <a:t>127</a:t>
+                        <a:t>139</a:t>
                       </a:r>
                       <a:endParaRPr sz="2400">
                         <a:latin typeface="Roboto"/>
@@ -24481,7 +24481,7 @@
                           <a:cs typeface="Roboto"/>
                           <a:sym typeface="Roboto"/>
                         </a:rPr>
-                        <a:t>261</a:t>
+                        <a:t>352</a:t>
                       </a:r>
                       <a:endParaRPr sz="2400">
                         <a:latin typeface="Roboto"/>
@@ -24562,7 +24562,7 @@
                           <a:cs typeface="Roboto"/>
                           <a:sym typeface="Roboto"/>
                         </a:rPr>
-                        <a:t>73</a:t>
+                        <a:t>94</a:t>
                       </a:r>
                       <a:endParaRPr sz="2400">
                         <a:latin typeface="Roboto"/>
@@ -24643,7 +24643,7 @@
                           <a:cs typeface="Roboto"/>
                           <a:sym typeface="Roboto"/>
                         </a:rPr>
-                        <a:t>9</a:t>
+                        <a:t>12</a:t>
                       </a:r>
                       <a:endParaRPr sz="2400">
                         <a:latin typeface="Roboto"/>
@@ -24816,7 +24816,7 @@
                           <a:cs typeface="Roboto"/>
                           <a:sym typeface="Roboto"/>
                         </a:rPr>
-                        <a:t>354</a:t>
+                        <a:t>72</a:t>
                       </a:r>
                       <a:endParaRPr sz="2400">
                         <a:latin typeface="Roboto"/>
@@ -24897,7 +24897,7 @@
                           <a:cs typeface="Roboto"/>
                           <a:sym typeface="Roboto"/>
                         </a:rPr>
-                        <a:t>54</a:t>
+                        <a:t>51</a:t>
                       </a:r>
                       <a:endParaRPr sz="2400">
                         <a:latin typeface="Roboto"/>
@@ -25350,7 +25350,7 @@
                 <a:cs typeface="Roboto"/>
                 <a:sym typeface="Roboto"/>
               </a:rPr>
-              <a:t xml:space="preserve"> A primeira semana de maio foi marcada pelo feriado do Dia do Trabalho (1/5), que impactou o volume de demanda no início do período. As campanhas mantiveram entrega estável nos dias de veiculação, com retomada gradual das interações a partir do dia 2.</a:t>
+              <a:t> A primeira semana de abril foi marcada pelos ajustes de orçamentoa, etapa importante para otimizar a entrega ao longo do mês. Além disso, o período coincidiu com o feriado de Páscoa, impactando o comportamento dos usuários e reduzindo naturalmente o volume de interações.</a:t>
             </a:r>
             <a:endParaRPr b="1" sz="1500">
               <a:solidFill>
@@ -25408,7 +25408,7 @@
                 <a:cs typeface="Roboto"/>
                 <a:sym typeface="Roboto"/>
               </a:rPr>
-              <a:t xml:space="preserve">Performance das campanhas de </a:t>
+              <a:t>Performance das campanhas de </a:t>
             </a:r>
             <a:r>
               <a:rPr b="1" lang="pt-BR" sz="6300">
@@ -25667,7 +25667,7 @@
                 <a:cs typeface="Roboto"/>
                 <a:sym typeface="Roboto"/>
               </a:rPr>
-              <a:t xml:space="preserve">semana </a:t>
+              <a:t>semana </a:t>
             </a:r>
             <a:r>
               <a:rPr b="1" lang="pt-BR" sz="1800">
@@ -25679,7 +25679,7 @@
                 <a:cs typeface="Roboto"/>
                 <a:sym typeface="Roboto"/>
               </a:rPr>
-              <a:t xml:space="preserve">4 </a:t>
+              <a:t>4 </a:t>
             </a:r>
             <a:endParaRPr b="1" sz="1800">
               <a:latin typeface="Roboto"/>
@@ -25742,7 +25742,7 @@
                 <a:cs typeface="Roboto"/>
                 <a:sym typeface="Roboto"/>
               </a:rPr>
-              <a:t>Na segunda semana de maio, observamos aceleração expressiva nas conversões, impulsionada pela maturação do algoritmo e pelas otimizações de lances e segmentação realizadas no início do mês. O volume de cliques nos botões de agendamento superou consistentemente 100 interações por dia.</a:t>
+              <a:t>Na segunda semana de abril, observamos uma retomada da demanda após o período de feriado, marcada pelo aumento nos picos de cliques no botão de agendamento, voltando a ultrapassar a marca de 100 interações, além do ganho de tração impulsionado pelas primeiras ativações e otimizações de mídia do mês.</a:t>
             </a:r>
             <a:endParaRPr b="1" sz="1500">
               <a:solidFill>
@@ -25808,7 +25808,7 @@
                 <a:cs typeface="Roboto"/>
                 <a:sym typeface="Roboto"/>
               </a:rPr>
-              <a:t xml:space="preserve"> A terceira semana de maio foi o melhor período do mês, com pico de conversões e maior eficiência das campanhas. A campanha Institucional registrou seu melhor CPA do período, e os botões de agendamento atingiram os maiores volumes semanais de interação.</a:t>
+              <a:t> A terceira semana de abril foi o melhor período do mês em performance e aproveitamento de verba. Com menos impactos sazonais em comparação à primeira e à quarta semana, concentramos maior estabilidade de demanda e melhor eficiência das campanhas.</a:t>
             </a:r>
             <a:endParaRPr b="1" sz="1500">
               <a:solidFill>
@@ -25874,7 +25874,7 @@
                 <a:cs typeface="Roboto"/>
                 <a:sym typeface="Roboto"/>
               </a:rPr>
-              <a:t>Na quarta semana, as campanhas mantiveram estabilidade, com volume de conversões consistente. O algoritmo de otimização demonstrou maturidade na entrega, priorizando usuários com maior propensão ao agendamento e sustentando a eficiência do CPA.</a:t>
+              <a:t>Na quarta semana, o feriado de Tiradentes impactou novamente o volume de demanda. Ainda assim, logo após o período, observamos uma retomada das interações, mostrando recuperação rápida e manutenção do interesse dos usuários.</a:t>
             </a:r>
             <a:endParaRPr b="1" sz="1500">
               <a:solidFill>
@@ -26081,7 +26081,7 @@
                 <a:cs typeface="Roboto"/>
                 <a:sym typeface="Roboto"/>
               </a:rPr>
-              <a:t>A quinta semana encerrou o período analisado (até 24/05). Com a proximidade do feriado de Corpus Christi no final do mês, monitoramos o comportamento da demanda para ajustar a estratégia e garantir a sustentação das conversões no fechamento de maio.</a:t>
+              <a:t>A quinta semana antecedeu o feriado de 1º de maio e contou com apenas quatro dias de veiculação, cenário que naturalmente reduz o volume de demanda. Ainda assim, mantivemos a estabilidade da entrega e sustentação dos resultados no fechamento do mês.</a:t>
             </a:r>
             <a:endParaRPr b="1" sz="1500">
               <a:solidFill>
@@ -26369,7 +26369,7 @@
                 <a:cs typeface="Roboto"/>
                 <a:sym typeface="Roboto"/>
               </a:rPr>
-              <a:t>O funil de conversão em maio demonstra excelente qualidade de tráfego: das 1.230.155 impressões totais, geramos 29.505 cliques (CTR de 2,4%), dos quais 5.004 resultaram em cliques nos botões de agendamento — representando 17% dos cliques totais, acima da média do mercado de saúde.</a:t>
+              <a:t>O funil de conversão em abril manteve consistência ao longo do período, com bom volume de alcance e evolução qualificada até os botões de agendamento, refletindo a maturação da estratégia de campanhas orientadas para conversão e o ganho de eficiência das otimizações implementadas desde março.</a:t>
             </a:r>
             <a:endParaRPr sz="2200">
               <a:solidFill>
@@ -26435,7 +26435,7 @@
                 <a:cs typeface="Roboto"/>
                 <a:sym typeface="Roboto"/>
               </a:rPr>
-              <a:t>Com 2.003 conversões nas primeiras 24 dias — 80% da meta de 2.500 —, a projeção para o mês completo aponta para atingimento integral da meta, reforçando a eficiência crescente da estratégia orientada para conversão implementada desde março.</a:t>
+              <a:t>Mesmo em um mês impactado por feriados e oscilações naturais de demanda, encerramos o período com 2.288 conversões, superando a meta mensal em 21%, o que reforça a eficiência da mídia e a capacidade de sustentar resultados mesmo em cenários de sazonalidade.</a:t>
             </a:r>
             <a:endParaRPr sz="2200">
               <a:solidFill>
@@ -26691,7 +26691,7 @@
                 <a:cs typeface="Roboto"/>
                 <a:sym typeface="Roboto"/>
               </a:rPr>
-              <a:t>Termos mais buscados em Maio</a:t>
+              <a:t>Termos mais buscados em Abril</a:t>
             </a:r>
             <a:endParaRPr b="0" i="0" sz="7700" u="none" cap="none" strike="noStrike">
               <a:solidFill>
@@ -26917,7 +26917,7 @@
                 <a:cs typeface="Roboto"/>
                 <a:sym typeface="Roboto"/>
               </a:rPr>
-              <a:t xml:space="preserve"> </a:t>
+              <a:t> </a:t>
             </a:r>
             <a:endParaRPr b="1" i="0" sz="2000" u="none" cap="none" strike="noStrike">
               <a:solidFill>
@@ -27170,7 +27170,7 @@
                 <a:cs typeface="Roboto"/>
                 <a:sym typeface="Roboto"/>
               </a:rPr>
-              <a:t>Os termos relacionados à marca seguiram liderando o volume de buscas em maio, com destaque para “Pro Matre” e suas variações. O alto reconhecimento da marca e a forte intenção de busca direta sustentam o volume de conversões na campanha Institucional.</a:t>
+              <a:t>Os termos relacionados à marca seguiram liderando o volume de buscas, com destaque para “Pro Matre” e suas variações, reforçando o alto reconhecimento da marca e a forte intenção de usuários já familiarizados com a  Pro Matre.</a:t>
             </a:r>
             <a:endParaRPr b="0" i="0" sz="2000" u="none" cap="none" strike="noStrike">
               <a:solidFill>
@@ -27387,7 +27387,7 @@
                 <a:cs typeface="Roboto"/>
                 <a:sym typeface="Roboto"/>
               </a:rPr>
-              <a:t>O termo “Pro Matre agendamento” seguiu com alta taxa de clique em maio, evidenciando um público em estágio avançado de decisão. A campanha Institucional captura essa intenção com eficiência, refletindo no CPA de R$ 1,88.</a:t>
+              <a:t>O termo “Pro Matre agendamento” se destacou pela alta taxa de clique, evidenciando um público em estágio avançado de decisão e forte propensão à conversão, alinhado ao objetivo das campanhas.</a:t>
             </a:r>
             <a:endParaRPr b="0" i="0" sz="2000" u="none" cap="none" strike="noStrike">
               <a:solidFill>
@@ -27885,7 +27885,7 @@
                 <a:cs typeface="Roboto"/>
                 <a:sym typeface="Roboto"/>
               </a:rPr>
-              <a:t>Termos como “ecocardiograma fetal”, “plano maternidade” e “pré-natal particular” reforçam oportunidades para ampliar a cobertura nas campanhas de Exames e Pré-Natal, com potencial de crescimento em conversões nessas frentes.</a:t>
+              <a:t>Termos como “ecocardiograma fetal” e “ultrassom morfológico 1 trimestre” reforçam o interesse por serviços específicos, mostrando oportunidades para ampliar a cobertura em campanhas de exames e especialidades.</a:t>
             </a:r>
             <a:endParaRPr b="0" i="0" sz="2000" u="none" cap="none" strike="noStrike">
               <a:solidFill>
